--- a/Rustifying-Your-CSharp-Codebase.pptx
+++ b/Rustifying-Your-CSharp-Codebase.pptx
@@ -12775,7 +12775,7 @@
                 <a:ea typeface="Alfa Slab One" pitchFamily="34" charset="-122"/>
                 <a:cs typeface="Alfa Slab One" pitchFamily="34" charset="-120"/>
               </a:rPr>
-              <a:t>Muscle memory made of LINQ comfortable.</a:t>
+              <a:t>Muscle memory made me comfortable.</a:t>
             </a:r>
             <a:endParaRPr lang="en-US" sz="3000" dirty="0"/>
           </a:p>
